--- a/generated/Tier 1 Broker Scorecards/Extra Mile Insurance Agency LLC_Broker_Scorecard.pptx
+++ b/generated/Tier 1 Broker Scorecards/Extra Mile Insurance Agency LLC_Broker_Scorecard.pptx
@@ -3394,7 +3394,7 @@
                         <a:rPr sz="900">
                           <a:latin typeface="Segoe UI"/>
                         </a:rPr>
-                        <a:t>Tier 1  |  9.76% / 15.00%</a:t>
+                        <a:t>Tier 1  |  9.64% / 15.00%</a:t>
                       </a:r>
                     </a:p>
                   </a:txBody>
@@ -3766,7 +3766,7 @@
                         <a:rPr sz="900">
                           <a:latin typeface="Segoe UI"/>
                         </a:rPr>
-                        <a:t>Non-Fleet Subs: 158  |  Binds: 16</a:t>
+                        <a:t>Non-Fleet Subs: 160  |  Binds: 16</a:t>
                       </a:r>
                     </a:p>
                   </a:txBody>
@@ -4428,7 +4428,7 @@
                           </a:solidFill>
                           <a:latin typeface="Segoe UI"/>
                         </a:rPr>
-                        <a:t>17</a:t>
+                        <a:t>19</a:t>
                       </a:r>
                     </a:p>
                   </a:txBody>
@@ -4707,7 +4707,7 @@
                           </a:solidFill>
                           <a:latin typeface="Segoe UI"/>
                         </a:rPr>
-                        <a:t>11.8%</a:t>
+                        <a:t>10.5%</a:t>
                       </a:r>
                     </a:p>
                   </a:txBody>

--- a/generated/Tier 1 Broker Scorecards/Extra Mile Insurance Agency LLC_Broker_Scorecard.pptx
+++ b/generated/Tier 1 Broker Scorecards/Extra Mile Insurance Agency LLC_Broker_Scorecard.pptx
@@ -3394,7 +3394,7 @@
                         <a:rPr sz="900">
                           <a:latin typeface="Segoe UI"/>
                         </a:rPr>
-                        <a:t>Tier 1  |  9.64% / 15.00%</a:t>
+                        <a:t>Tier 1  |  9.04% / 15.00%</a:t>
                       </a:r>
                     </a:p>
                   </a:txBody>
@@ -3766,7 +3766,7 @@
                         <a:rPr sz="900">
                           <a:latin typeface="Segoe UI"/>
                         </a:rPr>
-                        <a:t>Non-Fleet Subs: 160  |  Binds: 16</a:t>
+                        <a:t>Non-Fleet Subs: 160  |  Binds: 15</a:t>
                       </a:r>
                     </a:p>
                   </a:txBody>
@@ -4707,7 +4707,7 @@
                           </a:solidFill>
                           <a:latin typeface="Segoe UI"/>
                         </a:rPr>
-                        <a:t>10.5%</a:t>
+                        <a:t>5.3%</a:t>
                       </a:r>
                     </a:p>
                   </a:txBody>
@@ -4983,7 +4983,7 @@
                           </a:solidFill>
                           <a:latin typeface="Segoe UI"/>
                         </a:rPr>
-                        <a:t>2</a:t>
+                        <a:t>1</a:t>
                       </a:r>
                     </a:p>
                   </a:txBody>

--- a/generated/Tier 1 Broker Scorecards/Extra Mile Insurance Agency LLC_Broker_Scorecard.pptx
+++ b/generated/Tier 1 Broker Scorecards/Extra Mile Insurance Agency LLC_Broker_Scorecard.pptx
@@ -3394,7 +3394,7 @@
                         <a:rPr sz="900">
                           <a:latin typeface="Segoe UI"/>
                         </a:rPr>
-                        <a:t>Tier 1  |  9.04% / 15.00%</a:t>
+                        <a:t>Tier 1  |  9.58% / 15.00%</a:t>
                       </a:r>
                     </a:p>
                   </a:txBody>
@@ -3766,7 +3766,7 @@
                         <a:rPr sz="900">
                           <a:latin typeface="Segoe UI"/>
                         </a:rPr>
-                        <a:t>Non-Fleet Subs: 160  |  Binds: 15</a:t>
+                        <a:t>Non-Fleet Subs: 161  |  Binds: 16</a:t>
                       </a:r>
                     </a:p>
                   </a:txBody>
@@ -4428,7 +4428,7 @@
                           </a:solidFill>
                           <a:latin typeface="Segoe UI"/>
                         </a:rPr>
-                        <a:t>19</a:t>
+                        <a:t>20</a:t>
                       </a:r>
                     </a:p>
                   </a:txBody>
@@ -4707,7 +4707,7 @@
                           </a:solidFill>
                           <a:latin typeface="Segoe UI"/>
                         </a:rPr>
-                        <a:t>5.3%</a:t>
+                        <a:t>10.0%</a:t>
                       </a:r>
                     </a:p>
                   </a:txBody>
@@ -4983,7 +4983,7 @@
                           </a:solidFill>
                           <a:latin typeface="Segoe UI"/>
                         </a:rPr>
-                        <a:t>1</a:t>
+                        <a:t>2</a:t>
                       </a:r>
                     </a:p>
                   </a:txBody>

--- a/generated/Tier 1 Broker Scorecards/Extra Mile Insurance Agency LLC_Broker_Scorecard.pptx
+++ b/generated/Tier 1 Broker Scorecards/Extra Mile Insurance Agency LLC_Broker_Scorecard.pptx
@@ -3394,7 +3394,7 @@
                         <a:rPr sz="900">
                           <a:latin typeface="Segoe UI"/>
                         </a:rPr>
-                        <a:t>Tier 1  |  9.58% / 15.00%</a:t>
+                        <a:t>Tier 1  |  8.88% / 15.00%</a:t>
                       </a:r>
                     </a:p>
                   </a:txBody>
@@ -3766,7 +3766,7 @@
                         <a:rPr sz="900">
                           <a:latin typeface="Segoe UI"/>
                         </a:rPr>
-                        <a:t>Non-Fleet Subs: 161  |  Binds: 16</a:t>
+                        <a:t>Non-Fleet Subs: 163  |  Binds: 15</a:t>
                       </a:r>
                     </a:p>
                   </a:txBody>
@@ -4428,7 +4428,7 @@
                           </a:solidFill>
                           <a:latin typeface="Segoe UI"/>
                         </a:rPr>
-                        <a:t>20</a:t>
+                        <a:t>23</a:t>
                       </a:r>
                     </a:p>
                   </a:txBody>
@@ -4707,7 +4707,7 @@
                           </a:solidFill>
                           <a:latin typeface="Segoe UI"/>
                         </a:rPr>
-                        <a:t>10.0%</a:t>
+                        <a:t>4.3%</a:t>
                       </a:r>
                     </a:p>
                   </a:txBody>
@@ -4983,7 +4983,7 @@
                           </a:solidFill>
                           <a:latin typeface="Segoe UI"/>
                         </a:rPr>
-                        <a:t>2</a:t>
+                        <a:t>1</a:t>
                       </a:r>
                     </a:p>
                   </a:txBody>

--- a/generated/Tier 1 Broker Scorecards/Extra Mile Insurance Agency LLC_Broker_Scorecard.pptx
+++ b/generated/Tier 1 Broker Scorecards/Extra Mile Insurance Agency LLC_Broker_Scorecard.pptx
@@ -3394,7 +3394,7 @@
                         <a:rPr sz="900">
                           <a:latin typeface="Segoe UI"/>
                         </a:rPr>
-                        <a:t>Tier 1  |  8.88% / 15.00%</a:t>
+                        <a:t>Tier 1  |  9.47% / 15.00%</a:t>
                       </a:r>
                     </a:p>
                   </a:txBody>
@@ -3766,7 +3766,7 @@
                         <a:rPr sz="900">
                           <a:latin typeface="Segoe UI"/>
                         </a:rPr>
-                        <a:t>Non-Fleet Subs: 163  |  Binds: 15</a:t>
+                        <a:t>Non-Fleet Subs: 163  |  Binds: 16</a:t>
                       </a:r>
                     </a:p>
                   </a:txBody>

--- a/generated/Tier 1 Broker Scorecards/Extra Mile Insurance Agency LLC_Broker_Scorecard.pptx
+++ b/generated/Tier 1 Broker Scorecards/Extra Mile Insurance Agency LLC_Broker_Scorecard.pptx
@@ -3394,7 +3394,7 @@
                         <a:rPr sz="900">
                           <a:latin typeface="Segoe UI"/>
                         </a:rPr>
-                        <a:t>Tier 1  |  9.47% / 15.00%</a:t>
+                        <a:t>Tier 1  |  9.88% / 15.00%</a:t>
                       </a:r>
                     </a:p>
                   </a:txBody>
@@ -3766,7 +3766,7 @@
                         <a:rPr sz="900">
                           <a:latin typeface="Segoe UI"/>
                         </a:rPr>
-                        <a:t>Non-Fleet Subs: 163  |  Binds: 16</a:t>
+                        <a:t>Non-Fleet Subs: 166  |  Binds: 17</a:t>
                       </a:r>
                     </a:p>
                   </a:txBody>
@@ -4428,7 +4428,7 @@
                           </a:solidFill>
                           <a:latin typeface="Segoe UI"/>
                         </a:rPr>
-                        <a:t>23</a:t>
+                        <a:t>26</a:t>
                       </a:r>
                     </a:p>
                   </a:txBody>
@@ -4707,7 +4707,7 @@
                           </a:solidFill>
                           <a:latin typeface="Segoe UI"/>
                         </a:rPr>
-                        <a:t>4.3%</a:t>
+                        <a:t>3.8%</a:t>
                       </a:r>
                     </a:p>
                   </a:txBody>

--- a/generated/Tier 1 Broker Scorecards/Extra Mile Insurance Agency LLC_Broker_Scorecard.pptx
+++ b/generated/Tier 1 Broker Scorecards/Extra Mile Insurance Agency LLC_Broker_Scorecard.pptx
@@ -3394,7 +3394,7 @@
                         <a:rPr sz="900">
                           <a:latin typeface="Segoe UI"/>
                         </a:rPr>
-                        <a:t>Tier 1  |  9.88% / 15.00%</a:t>
+                        <a:t>Tier 1  |  9.25% / 15.00%</a:t>
                       </a:r>
                     </a:p>
                   </a:txBody>
@@ -3766,7 +3766,7 @@
                         <a:rPr sz="900">
                           <a:latin typeface="Segoe UI"/>
                         </a:rPr>
-                        <a:t>Non-Fleet Subs: 166  |  Binds: 17</a:t>
+                        <a:t>Non-Fleet Subs: 167  |  Binds: 16</a:t>
                       </a:r>
                     </a:p>
                   </a:txBody>
@@ -4428,7 +4428,7 @@
                           </a:solidFill>
                           <a:latin typeface="Segoe UI"/>
                         </a:rPr>
-                        <a:t>26</a:t>
+                        <a:t>28</a:t>
                       </a:r>
                     </a:p>
                   </a:txBody>
@@ -4707,7 +4707,7 @@
                           </a:solidFill>
                           <a:latin typeface="Segoe UI"/>
                         </a:rPr>
-                        <a:t>3.8%</a:t>
+                        <a:t>3.6%</a:t>
                       </a:r>
                     </a:p>
                   </a:txBody>

--- a/generated/Tier 1 Broker Scorecards/Extra Mile Insurance Agency LLC_Broker_Scorecard.pptx
+++ b/generated/Tier 1 Broker Scorecards/Extra Mile Insurance Agency LLC_Broker_Scorecard.pptx
@@ -3394,7 +3394,7 @@
                         <a:rPr sz="900">
                           <a:latin typeface="Segoe UI"/>
                         </a:rPr>
-                        <a:t>Tier 1  |  9.25% / 15.00%</a:t>
+                        <a:t>Tier 1  |  8.67% / 15.00%</a:t>
                       </a:r>
                     </a:p>
                   </a:txBody>
@@ -3766,7 +3766,7 @@
                         <a:rPr sz="900">
                           <a:latin typeface="Segoe UI"/>
                         </a:rPr>
-                        <a:t>Non-Fleet Subs: 167  |  Binds: 16</a:t>
+                        <a:t>Non-Fleet Subs: 167  |  Binds: 15</a:t>
                       </a:r>
                     </a:p>
                   </a:txBody>

--- a/generated/Tier 1 Broker Scorecards/Extra Mile Insurance Agency LLC_Broker_Scorecard.pptx
+++ b/generated/Tier 1 Broker Scorecards/Extra Mile Insurance Agency LLC_Broker_Scorecard.pptx
@@ -3357,7 +3357,7 @@
                         <a:rPr sz="800">
                           <a:latin typeface="Segoe UI"/>
                         </a:rPr>
-                        <a:t>$799,530.15 / $1,156,623.23 / $465,364.50</a:t>
+                        <a:t>$799,530.15 / $1,156,740.25 / $465,481.52</a:t>
                       </a:r>
                     </a:p>
                   </a:txBody>
@@ -3394,7 +3394,7 @@
                         <a:rPr sz="900">
                           <a:latin typeface="Segoe UI"/>
                         </a:rPr>
-                        <a:t>Tier 1  |  8.67% / 15.00%</a:t>
+                        <a:t>Tier 1  |  9.14% / 15.00%</a:t>
                       </a:r>
                     </a:p>
                   </a:txBody>
@@ -3766,7 +3766,7 @@
                         <a:rPr sz="900">
                           <a:latin typeface="Segoe UI"/>
                         </a:rPr>
-                        <a:t>Non-Fleet Subs: 167  |  Binds: 15</a:t>
+                        <a:t>Non-Fleet Subs: 169  |  Binds: 16</a:t>
                       </a:r>
                     </a:p>
                   </a:txBody>
@@ -3803,7 +3803,7 @@
                         <a:rPr sz="900">
                           <a:latin typeface="Segoe UI"/>
                         </a:rPr>
-                        <a:t>Non-Fleet Bound Premium: $465,364.50</a:t>
+                        <a:t>Non-Fleet Bound Premium: $465,481.52</a:t>
                       </a:r>
                     </a:p>
                   </a:txBody>
@@ -4428,7 +4428,7 @@
                           </a:solidFill>
                           <a:latin typeface="Segoe UI"/>
                         </a:rPr>
-                        <a:t>28</a:t>
+                        <a:t>30</a:t>
                       </a:r>
                     </a:p>
                   </a:txBody>
@@ -4707,7 +4707,7 @@
                           </a:solidFill>
                           <a:latin typeface="Segoe UI"/>
                         </a:rPr>
-                        <a:t>3.6%</a:t>
+                        <a:t>6.7%</a:t>
                       </a:r>
                     </a:p>
                   </a:txBody>
@@ -4983,7 +4983,7 @@
                           </a:solidFill>
                           <a:latin typeface="Segoe UI"/>
                         </a:rPr>
-                        <a:t>1</a:t>
+                        <a:t>2</a:t>
                       </a:r>
                     </a:p>
                   </a:txBody>
@@ -5262,7 +5262,7 @@
                           </a:solidFill>
                           <a:latin typeface="Segoe UI"/>
                         </a:rPr>
-                        <a:t>$57.2K</a:t>
+                        <a:t>$57.3K</a:t>
                       </a:r>
                     </a:p>
                   </a:txBody>

--- a/generated/Tier 1 Broker Scorecards/Extra Mile Insurance Agency LLC_Broker_Scorecard.pptx
+++ b/generated/Tier 1 Broker Scorecards/Extra Mile Insurance Agency LLC_Broker_Scorecard.pptx
@@ -3394,7 +3394,7 @@
                         <a:rPr sz="900">
                           <a:latin typeface="Segoe UI"/>
                         </a:rPr>
-                        <a:t>Tier 1  |  9.14% / 15.00%</a:t>
+                        <a:t>Tier 1  |  9.09% / 15.00%</a:t>
                       </a:r>
                     </a:p>
                   </a:txBody>
@@ -3766,7 +3766,7 @@
                         <a:rPr sz="900">
                           <a:latin typeface="Segoe UI"/>
                         </a:rPr>
-                        <a:t>Non-Fleet Subs: 169  |  Binds: 16</a:t>
+                        <a:t>Non-Fleet Subs: 170  |  Binds: 16</a:t>
                       </a:r>
                     </a:p>
                   </a:txBody>
@@ -4428,7 +4428,7 @@
                           </a:solidFill>
                           <a:latin typeface="Segoe UI"/>
                         </a:rPr>
-                        <a:t>30</a:t>
+                        <a:t>31</a:t>
                       </a:r>
                     </a:p>
                   </a:txBody>
@@ -4707,7 +4707,7 @@
                           </a:solidFill>
                           <a:latin typeface="Segoe UI"/>
                         </a:rPr>
-                        <a:t>6.7%</a:t>
+                        <a:t>6.5%</a:t>
                       </a:r>
                     </a:p>
                   </a:txBody>

--- a/generated/Tier 1 Broker Scorecards/Extra Mile Insurance Agency LLC_Broker_Scorecard.pptx
+++ b/generated/Tier 1 Broker Scorecards/Extra Mile Insurance Agency LLC_Broker_Scorecard.pptx
@@ -3357,7 +3357,7 @@
                         <a:rPr sz="800">
                           <a:latin typeface="Segoe UI"/>
                         </a:rPr>
-                        <a:t>$799,530.15 / $1,156,740.25 / $465,481.52</a:t>
+                        <a:t>$799,530.15 / $985,453.65 / $465,481.52</a:t>
                       </a:r>
                     </a:p>
                   </a:txBody>
